--- a/slide/pptx/P08-UTS.pptx
+++ b/slide/pptx/P08-UTS.pptx
@@ -124,7 +124,7 @@
   <p:extLst>
     <p:ext uri="{521415D9-36F7-43E2-AB2F-B90AF26B5E84}">
       <p14:sectionLst xmlns:p14="http://schemas.microsoft.com/office/powerpoint/2010/main">
-        <p14:section name="Pembuka" id="{a7b1efe1-0657-d799-60d1-c82a166a9416}">
+        <p14:section name="Pembuka" id="{51d8fa8f-bc4e-83d5-ee3f-ab7af38d63bb}">
           <p14:sldIdLst>
             <p14:sldId id="256"/>
             <p14:sldId id="257"/>
@@ -8201,10 +8201,40 @@
             <a:r>
               <a:rPr lang="en-US" sz="1500" dirty="0">
                 <a:solidFill>
+                  <a:srgbClr val="A35F14"/>
+                </a:solidFill>
+                <a:latin typeface="Consolas" pitchFamily="34" charset="0"/>
+                <a:ea typeface="Consolas" pitchFamily="34" charset="-122"/>
+                <a:cs typeface="Consolas" pitchFamily="34" charset="-120"/>
+              </a:rPr>
+              <a:t>ledcSetup()</a:t>
+            </a:r>
+            <a:r>
+              <a:rPr lang="en-US" sz="1500" dirty="0">
+                <a:solidFill>
                   <a:schemeClr val="tx1"/>
                 </a:solidFill>
               </a:rPr>
-              <a:t>ledcSetup() sudah tiada; pakai ledcAttach(pin, frek, bit).</a:t>
+              <a:t> milik core 2.x sudah dihapus; pakai </a:t>
+            </a:r>
+            <a:r>
+              <a:rPr lang="en-US" sz="1500" dirty="0">
+                <a:solidFill>
+                  <a:srgbClr val="A35F14"/>
+                </a:solidFill>
+                <a:latin typeface="Consolas" pitchFamily="34" charset="0"/>
+                <a:ea typeface="Consolas" pitchFamily="34" charset="-122"/>
+                <a:cs typeface="Consolas" pitchFamily="34" charset="-120"/>
+              </a:rPr>
+              <a:t>ledcAttach(pin, frek, bit)</a:t>
+            </a:r>
+            <a:r>
+              <a:rPr lang="en-US" sz="1500" dirty="0">
+                <a:solidFill>
+                  <a:schemeClr val="tx1"/>
+                </a:solidFill>
+              </a:rPr>
+              <a:t>.</a:t>
             </a:r>
             <a:endParaRPr lang="en-US" sz="1500" dirty="0"/>
           </a:p>
